--- a/RA3 - Seguretat activa/AA4 - Recuperacio de dades/RA3_AA4_Recuperacio_dades.pptx
+++ b/RA3 - Seguretat activa/AA4 - Recuperacio de dades/RA3_AA4_Recuperacio_dades.pptx
@@ -2140,6 +2140,10 @@
           </a:solidFill>
           <a:ln/>
         </p:spPr>
+        <p:txBody>
+          <a:bodyPr/>
+          <a:p/>
+        </p:txBody>
       </p:sp>
       <p:sp>
         <p:nvSpPr>
@@ -2160,6 +2164,10 @@
           </a:solidFill>
           <a:ln/>
         </p:spPr>
+        <p:txBody>
+          <a:bodyPr/>
+          <a:p/>
+        </p:txBody>
       </p:sp>
       <p:sp>
         <p:nvSpPr>
@@ -4241,6 +4249,10 @@
           </a:solidFill>
           <a:ln/>
         </p:spPr>
+        <p:txBody>
+          <a:bodyPr/>
+          <a:p/>
+        </p:txBody>
       </p:sp>
       <p:pic>
         <p:nvPicPr>
@@ -4733,6 +4745,10 @@
             </a:outerShdw>
           </a:effectLst>
         </p:spPr>
+        <p:txBody>
+          <a:bodyPr/>
+          <a:p/>
+        </p:txBody>
       </p:sp>
       <p:sp>
         <p:nvSpPr>
@@ -4753,6 +4769,10 @@
           </a:solidFill>
           <a:ln/>
         </p:spPr>
+        <p:txBody>
+          <a:bodyPr/>
+          <a:p/>
+        </p:txBody>
       </p:sp>
       <p:pic>
         <p:nvPicPr>
@@ -4892,6 +4912,10 @@
             </a:outerShdw>
           </a:effectLst>
         </p:spPr>
+        <p:txBody>
+          <a:bodyPr/>
+          <a:p/>
+        </p:txBody>
       </p:sp>
       <p:sp>
         <p:nvSpPr>
@@ -4912,6 +4936,10 @@
           </a:solidFill>
           <a:ln/>
         </p:spPr>
+        <p:txBody>
+          <a:bodyPr/>
+          <a:p/>
+        </p:txBody>
       </p:sp>
       <p:pic>
         <p:nvPicPr>
@@ -5051,6 +5079,10 @@
             </a:outerShdw>
           </a:effectLst>
         </p:spPr>
+        <p:txBody>
+          <a:bodyPr/>
+          <a:p/>
+        </p:txBody>
       </p:sp>
       <p:sp>
         <p:nvSpPr>
@@ -5071,6 +5103,10 @@
           </a:solidFill>
           <a:ln/>
         </p:spPr>
+        <p:txBody>
+          <a:bodyPr/>
+          <a:p/>
+        </p:txBody>
       </p:sp>
       <p:pic>
         <p:nvPicPr>
@@ -5994,7 +6030,7 @@
                 <a:ea typeface="Calibri" pitchFamily="34" charset="-122"/>
                 <a:cs typeface="Calibri" pitchFamily="34" charset="-120"/>
               </a:rPr>
-              <a:t>Llicència Creative Commons BY-NC-SA · Institut Obert de Catalunya, 2011 (materials adaptats i ampliats)</a:t>
+              <a:t>Llicència CC BY-SA 4.0 · Adaptat de "Materials" (SMX-0226SI), Carlos Alonso Martínez, Escola Pia de Mataró</a:t>
             </a:r>
             <a:endParaRPr lang="en-US" sz="1050" dirty="0"/>
           </a:p>
@@ -6221,6 +6257,10 @@
             </a:outerShdw>
           </a:effectLst>
         </p:spPr>
+        <p:txBody>
+          <a:bodyPr/>
+          <a:p/>
+        </p:txBody>
       </p:sp>
       <p:sp>
         <p:nvSpPr>
@@ -6241,6 +6281,10 @@
           </a:solidFill>
           <a:ln/>
         </p:spPr>
+        <p:txBody>
+          <a:bodyPr/>
+          <a:p/>
+        </p:txBody>
       </p:sp>
       <p:pic>
         <p:nvPicPr>
@@ -6380,6 +6424,10 @@
             </a:outerShdw>
           </a:effectLst>
         </p:spPr>
+        <p:txBody>
+          <a:bodyPr/>
+          <a:p/>
+        </p:txBody>
       </p:sp>
       <p:sp>
         <p:nvSpPr>
@@ -6400,6 +6448,10 @@
           </a:solidFill>
           <a:ln/>
         </p:spPr>
+        <p:txBody>
+          <a:bodyPr/>
+          <a:p/>
+        </p:txBody>
       </p:sp>
       <p:pic>
         <p:nvPicPr>
@@ -6539,6 +6591,10 @@
             </a:outerShdw>
           </a:effectLst>
         </p:spPr>
+        <p:txBody>
+          <a:bodyPr/>
+          <a:p/>
+        </p:txBody>
       </p:sp>
       <p:sp>
         <p:nvSpPr>
@@ -6559,6 +6615,10 @@
           </a:solidFill>
           <a:ln/>
         </p:spPr>
+        <p:txBody>
+          <a:bodyPr/>
+          <a:p/>
+        </p:txBody>
       </p:sp>
       <p:pic>
         <p:nvPicPr>
@@ -7182,6 +7242,10 @@
             </a:outerShdw>
           </a:effectLst>
         </p:spPr>
+        <p:txBody>
+          <a:bodyPr/>
+          <a:p/>
+        </p:txBody>
       </p:sp>
       <p:sp>
         <p:nvSpPr>
@@ -7202,6 +7266,10 @@
           </a:solidFill>
           <a:ln/>
         </p:spPr>
+        <p:txBody>
+          <a:bodyPr/>
+          <a:p/>
+        </p:txBody>
       </p:sp>
       <p:pic>
         <p:nvPicPr>
@@ -7341,6 +7409,10 @@
             </a:outerShdw>
           </a:effectLst>
         </p:spPr>
+        <p:txBody>
+          <a:bodyPr/>
+          <a:p/>
+        </p:txBody>
       </p:sp>
       <p:sp>
         <p:nvSpPr>
@@ -7361,6 +7433,10 @@
           </a:solidFill>
           <a:ln/>
         </p:spPr>
+        <p:txBody>
+          <a:bodyPr/>
+          <a:p/>
+        </p:txBody>
       </p:sp>
       <p:pic>
         <p:nvPicPr>
@@ -7500,6 +7576,10 @@
             </a:outerShdw>
           </a:effectLst>
         </p:spPr>
+        <p:txBody>
+          <a:bodyPr/>
+          <a:p/>
+        </p:txBody>
       </p:sp>
       <p:sp>
         <p:nvSpPr>
@@ -7520,6 +7600,10 @@
           </a:solidFill>
           <a:ln/>
         </p:spPr>
+        <p:txBody>
+          <a:bodyPr/>
+          <a:p/>
+        </p:txBody>
       </p:sp>
       <p:pic>
         <p:nvPicPr>
@@ -7808,6 +7892,10 @@
             </a:outerShdw>
           </a:effectLst>
         </p:spPr>
+        <p:txBody>
+          <a:bodyPr/>
+          <a:p/>
+        </p:txBody>
       </p:sp>
       <p:sp>
         <p:nvSpPr>
@@ -7828,6 +7916,10 @@
           </a:solidFill>
           <a:ln/>
         </p:spPr>
+        <p:txBody>
+          <a:bodyPr/>
+          <a:p/>
+        </p:txBody>
       </p:sp>
       <p:pic>
         <p:nvPicPr>
@@ -7967,6 +8059,10 @@
             </a:outerShdw>
           </a:effectLst>
         </p:spPr>
+        <p:txBody>
+          <a:bodyPr/>
+          <a:p/>
+        </p:txBody>
       </p:sp>
       <p:sp>
         <p:nvSpPr>
@@ -7987,6 +8083,10 @@
           </a:solidFill>
           <a:ln/>
         </p:spPr>
+        <p:txBody>
+          <a:bodyPr/>
+          <a:p/>
+        </p:txBody>
       </p:sp>
       <p:pic>
         <p:nvPicPr>
@@ -8263,6 +8363,10 @@
           </a:solidFill>
           <a:ln/>
         </p:spPr>
+        <p:txBody>
+          <a:bodyPr/>
+          <a:p/>
+        </p:txBody>
       </p:sp>
       <p:pic>
         <p:nvPicPr>
@@ -8351,6 +8455,10 @@
           </a:solidFill>
           <a:ln/>
         </p:spPr>
+        <p:txBody>
+          <a:bodyPr/>
+          <a:p/>
+        </p:txBody>
       </p:sp>
       <p:pic>
         <p:nvPicPr>
@@ -9708,6 +9816,10 @@
           </a:solidFill>
           <a:ln/>
         </p:spPr>
+        <p:txBody>
+          <a:bodyPr/>
+          <a:p/>
+        </p:txBody>
       </p:sp>
       <p:pic>
         <p:nvPicPr>
